--- a/data/outputs/v2/Grade11/Biology/Quizzes/SS2.2_Growth_and_Development_in_Plants/Biology_G11_SS2.2_Growth_and_Development_in_Plants_L8_QuickCheck.pptx
+++ b/data/outputs/v2/Grade11/Biology/Quizzes/SS2.2_Growth_and_Development_in_Plants/Biology_G11_SS2.2_Growth_and_Development_in_Plants_L8_QuickCheck.pptx
@@ -1698,7 +1698,7 @@
                 <a:ea typeface="Arial" pitchFamily="34" charset="-122"/>
                 <a:cs typeface="Arial" pitchFamily="34" charset="-120"/>
               </a:rPr>
-              <a:t>Lesson 8: Measuring Growth: Seedling Height, Stem Width and Growth Curves of Maize and Beans</a:t>
+              <a:t>Lesson 8: Applying Hormones: Rooting Cuttings for the School Tree Nursery</a:t>
             </a:r>
             <a:endParaRPr lang="en-US" sz="2000" dirty="0"/>
           </a:p>
@@ -2021,7 +2021,7 @@
                 <a:ea typeface="Arial" pitchFamily="34" charset="-122"/>
                 <a:cs typeface="Arial" pitchFamily="34" charset="-120"/>
               </a:rPr>
-              <a:t>Before measuring anything, a learner predicts that a maize seedling will grow the same number of centimetres every day for 21 days. Which statement about real seedling growth best challenges this prediction?</a:t>
+              <a:t>In Lesson 7 you learned that auxin is involved in rooting. A hibiscus stem cutting has been cut from the parent plant and has no roots. Where does auxin collect in the cutting so that roots can form?</a:t>
             </a:r>
             <a:endParaRPr lang="en-US" sz="1800" dirty="0"/>
           </a:p>
@@ -2121,7 +2121,7 @@
                 <a:ea typeface="Arial" pitchFamily="34" charset="-122"/>
                 <a:cs typeface="Arial" pitchFamily="34" charset="-120"/>
               </a:rPr>
-              <a:t>Growth happens only in the first three days</a:t>
+              <a:t>In the soil around the cutting</a:t>
             </a:r>
             <a:endParaRPr lang="en-US" sz="1700" dirty="0"/>
           </a:p>
@@ -2221,7 +2221,7 @@
                 <a:ea typeface="Arial" pitchFamily="34" charset="-122"/>
                 <a:cs typeface="Arial" pitchFamily="34" charset="-120"/>
               </a:rPr>
-              <a:t>Growth keeps getting faster every day until the plant dies</a:t>
+              <a:t>At the tips of the leaves</a:t>
             </a:r>
             <a:endParaRPr lang="en-US" sz="1700" dirty="0"/>
           </a:p>
@@ -2321,7 +2321,7 @@
                 <a:ea typeface="Arial" pitchFamily="34" charset="-122"/>
                 <a:cs typeface="Arial" pitchFamily="34" charset="-120"/>
               </a:rPr>
-              <a:t>Growth is slow at first, then rapid, then slows down and levels off</a:t>
+              <a:t>In seeds inside the cutting</a:t>
             </a:r>
             <a:endParaRPr lang="en-US" sz="1700" dirty="0"/>
           </a:p>
@@ -2421,7 +2421,7 @@
                 <a:ea typeface="Arial" pitchFamily="34" charset="-122"/>
                 <a:cs typeface="Arial" pitchFamily="34" charset="-120"/>
               </a:rPr>
-              <a:t>Growth is steady, so the graph is a straight line</a:t>
+              <a:t>At the cut base of the stem</a:t>
             </a:r>
             <a:endParaRPr lang="en-US" sz="1700" dirty="0"/>
           </a:p>
@@ -2623,7 +2623,7 @@
               <a:buNone/>
             </a:pPr>
             <a:r>
-              <a:rPr lang="en-US" sz="2000" b="1" dirty="0">
+              <a:rPr lang="en-US" sz="1800" b="1" dirty="0">
                 <a:solidFill>
                   <a:srgbClr val="FFFFFF"/>
                 </a:solidFill>
@@ -2631,9 +2631,9 @@
                 <a:ea typeface="Arial" pitchFamily="34" charset="-122"/>
                 <a:cs typeface="Arial" pitchFamily="34" charset="-120"/>
               </a:rPr>
-              <a:t>A group wraps thread once around a bean stem. The thread measures 12 mm against a ruler. Using the method of dividing the circumference by 3, what is the approximate stem width (diameter)?</a:t>
-            </a:r>
-            <a:endParaRPr lang="en-US" sz="2000" dirty="0"/>
+              <a:t>Madam Achieng's class compares bulb onion extract, Aloe vera gel and cinnamon powder for rooting hibiscus cuttings. They also include a container of plain water with no added substance. Why is plain water included?</a:t>
+            </a:r>
+            <a:endParaRPr lang="en-US" sz="1800" dirty="0"/>
           </a:p>
         </p:txBody>
       </p:sp>
@@ -2723,7 +2723,7 @@
               <a:buNone/>
             </a:pPr>
             <a:r>
-              <a:rPr lang="en-US" sz="1700" dirty="0">
+              <a:rPr lang="en-US" sz="1500" dirty="0">
                 <a:solidFill>
                   <a:srgbClr val="FFFFFF"/>
                 </a:solidFill>
@@ -2731,9 +2731,9 @@
                 <a:ea typeface="Arial" pitchFamily="34" charset="-122"/>
                 <a:cs typeface="Arial" pitchFamily="34" charset="-120"/>
               </a:rPr>
-              <a:t>12 mm</a:t>
-            </a:r>
-            <a:endParaRPr lang="en-US" sz="1700" dirty="0"/>
+              <a:t>It gives the cuttings the hormone they need to root</a:t>
+            </a:r>
+            <a:endParaRPr lang="en-US" sz="1500" dirty="0"/>
           </a:p>
         </p:txBody>
       </p:sp>
@@ -2823,7 +2823,7 @@
               <a:buNone/>
             </a:pPr>
             <a:r>
-              <a:rPr lang="en-US" sz="1700" dirty="0">
+              <a:rPr lang="en-US" sz="1500" dirty="0">
                 <a:solidFill>
                   <a:srgbClr val="FFFFFF"/>
                 </a:solidFill>
@@ -2831,9 +2831,9 @@
                 <a:ea typeface="Arial" pitchFamily="34" charset="-122"/>
                 <a:cs typeface="Arial" pitchFamily="34" charset="-120"/>
               </a:rPr>
-              <a:t>9 mm</a:t>
-            </a:r>
-            <a:endParaRPr lang="en-US" sz="1700" dirty="0"/>
+              <a:t>It makes the test fair by changing the water in all the other containers</a:t>
+            </a:r>
+            <a:endParaRPr lang="en-US" sz="1500" dirty="0"/>
           </a:p>
         </p:txBody>
       </p:sp>
@@ -2923,7 +2923,7 @@
               <a:buNone/>
             </a:pPr>
             <a:r>
-              <a:rPr lang="en-US" sz="1700" dirty="0">
+              <a:rPr lang="en-US" sz="1500" dirty="0">
                 <a:solidFill>
                   <a:srgbClr val="FFFFFF"/>
                 </a:solidFill>
@@ -2931,9 +2931,9 @@
                 <a:ea typeface="Arial" pitchFamily="34" charset="-122"/>
                 <a:cs typeface="Arial" pitchFamily="34" charset="-120"/>
               </a:rPr>
-              <a:t>36 mm</a:t>
-            </a:r>
-            <a:endParaRPr lang="en-US" sz="1700" dirty="0"/>
+              <a:t>It is the control, so we can compare treated cuttings with cuttings that had no added substance</a:t>
+            </a:r>
+            <a:endParaRPr lang="en-US" sz="1500" dirty="0"/>
           </a:p>
         </p:txBody>
       </p:sp>
@@ -3023,7 +3023,7 @@
               <a:buNone/>
             </a:pPr>
             <a:r>
-              <a:rPr lang="en-US" sz="1700" dirty="0">
+              <a:rPr lang="en-US" sz="1500" dirty="0">
                 <a:solidFill>
                   <a:srgbClr val="FFFFFF"/>
                 </a:solidFill>
@@ -3031,9 +3031,9 @@
                 <a:ea typeface="Arial" pitchFamily="34" charset="-122"/>
                 <a:cs typeface="Arial" pitchFamily="34" charset="-120"/>
               </a:rPr>
-              <a:t>4 mm</a:t>
-            </a:r>
-            <a:endParaRPr lang="en-US" sz="1700" dirty="0"/>
+              <a:t>It washes the cuttings so they stay clean</a:t>
+            </a:r>
+            <a:endParaRPr lang="en-US" sz="1500" dirty="0"/>
           </a:p>
         </p:txBody>
       </p:sp>
@@ -3233,7 +3233,7 @@
               <a:buNone/>
             </a:pPr>
             <a:r>
-              <a:rPr lang="en-US" sz="2000" b="1" dirty="0">
+              <a:rPr lang="en-US" sz="1800" b="1" dirty="0">
                 <a:solidFill>
                   <a:srgbClr val="FFFFFF"/>
                 </a:solidFill>
@@ -3241,9 +3241,9 @@
                 <a:ea typeface="Arial" pitchFamily="34" charset="-122"/>
                 <a:cs typeface="Arial" pitchFamily="34" charset="-120"/>
               </a:rPr>
-              <a:t>A group measures three maize seedlings from the class nursery. Their heights are 30 cm, 32 cm and 40 cm. What is the mean height?</a:t>
-            </a:r>
-            <a:endParaRPr lang="en-US" sz="2000" dirty="0"/>
+              <a:t>In a cuttings fair test, the type of treatment (water, onion, Aloe vera or cinnamon) is changed on purpose, and the number of cuttings that root is measured. Which of these must be a controlled variable (kept the same for all cuttings)?</a:t>
+            </a:r>
+            <a:endParaRPr lang="en-US" sz="1800" dirty="0"/>
           </a:p>
         </p:txBody>
       </p:sp>
@@ -3341,7 +3341,7 @@
                 <a:ea typeface="Arial" pitchFamily="34" charset="-122"/>
                 <a:cs typeface="Arial" pitchFamily="34" charset="-120"/>
               </a:rPr>
-              <a:t>34 cm</a:t>
+              <a:t>The percentage rooting after 21 days</a:t>
             </a:r>
             <a:endParaRPr lang="en-US" sz="1700" dirty="0"/>
           </a:p>
@@ -3441,7 +3441,7 @@
                 <a:ea typeface="Arial" pitchFamily="34" charset="-122"/>
                 <a:cs typeface="Arial" pitchFamily="34" charset="-120"/>
               </a:rPr>
-              <a:t>32 cm</a:t>
+              <a:t>The type of treatment used</a:t>
             </a:r>
             <a:endParaRPr lang="en-US" sz="1700" dirty="0"/>
           </a:p>
@@ -3541,7 +3541,7 @@
                 <a:ea typeface="Arial" pitchFamily="34" charset="-122"/>
                 <a:cs typeface="Arial" pitchFamily="34" charset="-120"/>
               </a:rPr>
-              <a:t>102 cm</a:t>
+              <a:t>The number of cuttings that root</a:t>
             </a:r>
             <a:endParaRPr lang="en-US" sz="1700" dirty="0"/>
           </a:p>
@@ -3641,7 +3641,7 @@
                 <a:ea typeface="Arial" pitchFamily="34" charset="-122"/>
                 <a:cs typeface="Arial" pitchFamily="34" charset="-120"/>
               </a:rPr>
-              <a:t>40 cm</a:t>
+              <a:t>The length of each cutting (about 15 cm)</a:t>
             </a:r>
             <a:endParaRPr lang="en-US" sz="1700" dirty="0"/>
           </a:p>
@@ -3812,7 +3812,7 @@
                 <a:ea typeface="Arial" pitchFamily="34" charset="-122"/>
                 <a:cs typeface="Arial" pitchFamily="34" charset="-120"/>
               </a:rPr>
-              <a:t>Use after: Explain phase</a:t>
+              <a:t>Use after: Observe phase</a:t>
             </a:r>
             <a:endParaRPr lang="en-US" sz="1100" dirty="0"/>
           </a:p>
@@ -3843,7 +3843,7 @@
               <a:buNone/>
             </a:pPr>
             <a:r>
-              <a:rPr lang="en-US" sz="1800" b="1" dirty="0">
+              <a:rPr lang="en-US" sz="2000" b="1" dirty="0">
                 <a:solidFill>
                   <a:srgbClr val="FFFFFF"/>
                 </a:solidFill>
@@ -3851,9 +3851,9 @@
                 <a:ea typeface="Arial" pitchFamily="34" charset="-122"/>
                 <a:cs typeface="Arial" pitchFamily="34" charset="-120"/>
               </a:rPr>
-              <a:t>Mean height data: maize was 8 cm on Day 6 and 48 cm on Day 15. Beans were 3 cm on Day 6 and 17 cm on Day 15. Between Day 6 and Day 15, how many more centimetres did the maize grow than the beans?</a:t>
-            </a:r>
-            <a:endParaRPr lang="en-US" sz="1800" dirty="0"/>
+              <a:t>In the class nursery test, 30 hibiscus cuttings were treated with bulb onion extract. After 21 days, 21 of them had rooted. What is the percentage rooting?</a:t>
+            </a:r>
+            <a:endParaRPr lang="en-US" sz="2000" dirty="0"/>
           </a:p>
         </p:txBody>
       </p:sp>
@@ -3951,7 +3951,7 @@
                 <a:ea typeface="Arial" pitchFamily="34" charset="-122"/>
                 <a:cs typeface="Arial" pitchFamily="34" charset="-120"/>
               </a:rPr>
-              <a:t>40 cm</a:t>
+              <a:t>30%</a:t>
             </a:r>
             <a:endParaRPr lang="en-US" sz="1700" dirty="0"/>
           </a:p>
@@ -4051,7 +4051,7 @@
                 <a:ea typeface="Arial" pitchFamily="34" charset="-122"/>
                 <a:cs typeface="Arial" pitchFamily="34" charset="-120"/>
               </a:rPr>
-              <a:t>14 cm</a:t>
+              <a:t>21%</a:t>
             </a:r>
             <a:endParaRPr lang="en-US" sz="1700" dirty="0"/>
           </a:p>
@@ -4151,7 +4151,7 @@
                 <a:ea typeface="Arial" pitchFamily="34" charset="-122"/>
                 <a:cs typeface="Arial" pitchFamily="34" charset="-120"/>
               </a:rPr>
-              <a:t>26 cm</a:t>
+              <a:t>70%</a:t>
             </a:r>
             <a:endParaRPr lang="en-US" sz="1700" dirty="0"/>
           </a:p>
@@ -4251,7 +4251,7 @@
                 <a:ea typeface="Arial" pitchFamily="34" charset="-122"/>
                 <a:cs typeface="Arial" pitchFamily="34" charset="-120"/>
               </a:rPr>
-              <a:t>31 cm</a:t>
+              <a:t>51%</a:t>
             </a:r>
             <a:endParaRPr lang="en-US" sz="1700" dirty="0"/>
           </a:p>
@@ -4453,7 +4453,7 @@
               <a:buNone/>
             </a:pPr>
             <a:r>
-              <a:rPr lang="en-US" sz="1800" b="1" dirty="0">
+              <a:rPr lang="en-US" sz="2000" b="1" dirty="0">
                 <a:solidFill>
                   <a:srgbClr val="FFFFFF"/>
                 </a:solidFill>
@@ -4461,9 +4461,9 @@
                 <a:ea typeface="Arial" pitchFamily="34" charset="-122"/>
                 <a:cs typeface="Arial" pitchFamily="34" charset="-120"/>
               </a:rPr>
-              <a:t>Mean maize height increased from 18 cm on Day 9 to 32 cm on Day 12. It then went from 58 cm on Day 18 to only 62 cm on Day 21. What does the flatter part of the curve between Day 18 and Day 21 show?</a:t>
-            </a:r>
-            <a:endParaRPr lang="en-US" sz="1800" dirty="0"/>
+              <a:t>In a nursery test with 30 cuttings per treatment, 9 cuttings in plain water (no added substance) still grew roots. What does this tell us?</a:t>
+            </a:r>
+            <a:endParaRPr lang="en-US" sz="2000" dirty="0"/>
           </a:p>
         </p:txBody>
       </p:sp>
@@ -4561,7 +4561,7 @@
                 <a:ea typeface="Arial" pitchFamily="34" charset="-122"/>
                 <a:cs typeface="Arial" pitchFamily="34" charset="-120"/>
               </a:rPr>
-              <a:t>The seed has not yet absorbed water</a:t>
+              <a:t>The cuttings can make some auxin themselves, so some root even without a treatment</a:t>
             </a:r>
             <a:endParaRPr lang="en-US" sz="1500" dirty="0"/>
           </a:p>
@@ -4661,7 +4661,7 @@
                 <a:ea typeface="Arial" pitchFamily="34" charset="-122"/>
                 <a:cs typeface="Arial" pitchFamily="34" charset="-120"/>
               </a:rPr>
-              <a:t>The stationary phase, where growth slows as the plant matures or resources limit it</a:t>
+              <a:t>The test was unfair and the results cannot be used</a:t>
             </a:r>
             <a:endParaRPr lang="en-US" sz="1500" dirty="0"/>
           </a:p>
@@ -4761,7 +4761,7 @@
                 <a:ea typeface="Arial" pitchFamily="34" charset="-122"/>
                 <a:cs typeface="Arial" pitchFamily="34" charset="-120"/>
               </a:rPr>
-              <a:t>The rapid phase, where growth is fastest</a:t>
+              <a:t>Cuttings root only when they have seeds</a:t>
             </a:r>
             <a:endParaRPr lang="en-US" sz="1500" dirty="0"/>
           </a:p>
@@ -4861,7 +4861,7 @@
                 <a:ea typeface="Arial" pitchFamily="34" charset="-122"/>
                 <a:cs typeface="Arial" pitchFamily="34" charset="-120"/>
               </a:rPr>
-              <a:t>The plant has died</a:t>
+              <a:t>The plain water contained a rooting hormone</a:t>
             </a:r>
             <a:endParaRPr lang="en-US" sz="1500" dirty="0"/>
           </a:p>
@@ -5032,7 +5032,7 @@
                 <a:ea typeface="Arial" pitchFamily="34" charset="-122"/>
                 <a:cs typeface="Arial" pitchFamily="34" charset="-120"/>
               </a:rPr>
-              <a:t>Use after: DQB phase</a:t>
+              <a:t>Use after: Explain phase</a:t>
             </a:r>
             <a:endParaRPr lang="en-US" sz="1100" dirty="0"/>
           </a:p>
@@ -5071,7 +5071,7 @@
                 <a:ea typeface="Arial" pitchFamily="34" charset="-122"/>
                 <a:cs typeface="Arial" pitchFamily="34" charset="-120"/>
               </a:rPr>
-              <a:t>Maize and bean seedlings were planted on the same day after the same rain. The two growth curves show that growth is not constant, and that the two crops grow at different rates. Why does this lead to the question 'Do we have hormones in plants?'</a:t>
+              <a:t>Results after 21 days (30 cuttings each): plain water 9 rooted, bulb onion 21, Aloe vera 24, cinnamon 18. A learner says Aloe vera is better than onion. Which statement is the best limit of this evidence?</a:t>
             </a:r>
             <a:endParaRPr lang="en-US" sz="1800" dirty="0"/>
           </a:p>
@@ -5171,7 +5171,7 @@
                 <a:ea typeface="Arial" pitchFamily="34" charset="-122"/>
                 <a:cs typeface="Arial" pitchFamily="34" charset="-120"/>
               </a:rPr>
-              <a:t>Because growth speeds up and slows down at different times, suggesting something inside the plant may control its timing and speed</a:t>
+              <a:t>Rooting can never be linked to auxin because auxin was not measured</a:t>
             </a:r>
             <a:endParaRPr lang="en-US" sz="1300" dirty="0"/>
           </a:p>
@@ -5271,7 +5271,7 @@
                 <a:ea typeface="Arial" pitchFamily="34" charset="-122"/>
                 <a:cs typeface="Arial" pitchFamily="34" charset="-120"/>
               </a:rPr>
-              <a:t>Because seeds that failed to germinate have no growth curve</a:t>
+              <a:t>Plain water rooted some cuttings, so the whole test is invalid</a:t>
             </a:r>
             <a:endParaRPr lang="en-US" sz="1300" dirty="0"/>
           </a:p>
@@ -5371,7 +5371,7 @@
                 <a:ea typeface="Arial" pitchFamily="34" charset="-122"/>
                 <a:cs typeface="Arial" pitchFamily="34" charset="-120"/>
               </a:rPr>
-              <a:t>Because the curves are straight lines</a:t>
+              <a:t>The difference between 24 and 21 is small, and there was only one trial on one species, so we cannot be fully sure</a:t>
             </a:r>
             <a:endParaRPr lang="en-US" sz="1300" dirty="0"/>
           </a:p>
@@ -5471,7 +5471,7 @@
                 <a:ea typeface="Arial" pitchFamily="34" charset="-122"/>
                 <a:cs typeface="Arial" pitchFamily="34" charset="-120"/>
               </a:rPr>
-              <a:t>Because plants make insulin like animals do</a:t>
+              <a:t>Percentages cannot be used to compare treatments</a:t>
             </a:r>
             <a:endParaRPr lang="en-US" sz="1300" dirty="0"/>
           </a:p>
@@ -5673,7 +5673,7 @@
               <a:buNone/>
             </a:pPr>
             <a:r>
-              <a:rPr lang="en-US" sz="2000" b="1" dirty="0">
+              <a:rPr lang="en-US" sz="1600" b="1" dirty="0">
                 <a:solidFill>
                   <a:srgbClr val="FFFFFF"/>
                 </a:solidFill>
@@ -5681,9 +5681,9 @@
                 <a:ea typeface="Arial" pitchFamily="34" charset="-122"/>
                 <a:cs typeface="Arial" pitchFamily="34" charset="-120"/>
               </a:rPr>
-              <a:t>In a revised model of early growth, arrows are drawn showing food stores feeding the young seedling. Which pair correctly shows where maize and bean seedlings get these early food stores?</a:t>
-            </a:r>
-            <a:endParaRPr lang="en-US" sz="2000" dirty="0"/>
+              <a:t>Learners add this to the model explaining why Mr. Wafula's maize and beans grew differently, even though they had the same rain and planting date. Which revision is best supported by the cuttings data (plain water 30%, cinnamon 60%, onion 70%, Aloe vera 80% rooting)?</a:t>
+            </a:r>
+            <a:endParaRPr lang="en-US" sz="1600" dirty="0"/>
           </a:p>
         </p:txBody>
       </p:sp>
@@ -5773,7 +5773,7 @@
               <a:buNone/>
             </a:pPr>
             <a:r>
-              <a:rPr lang="en-US" sz="1700" dirty="0">
+              <a:rPr lang="en-US" sz="1300" dirty="0">
                 <a:solidFill>
                   <a:srgbClr val="FFFFFF"/>
                 </a:solidFill>
@@ -5781,9 +5781,9 @@
                 <a:ea typeface="Arial" pitchFamily="34" charset="-122"/>
                 <a:cs typeface="Arial" pitchFamily="34" charset="-120"/>
               </a:rPr>
-              <a:t>Maize from the endosperm, beans from the cotyledons</a:t>
-            </a:r>
-            <a:endParaRPr lang="en-US" sz="1700" dirty="0"/>
+              <a:t>Differences in growth are caused only by rain and planting date</a:t>
+            </a:r>
+            <a:endParaRPr lang="en-US" sz="1300" dirty="0"/>
           </a:p>
         </p:txBody>
       </p:sp>
@@ -5873,7 +5873,7 @@
               <a:buNone/>
             </a:pPr>
             <a:r>
-              <a:rPr lang="en-US" sz="1700" dirty="0">
+              <a:rPr lang="en-US" sz="1300" dirty="0">
                 <a:solidFill>
                   <a:srgbClr val="FFFFFF"/>
                 </a:solidFill>
@@ -5881,9 +5881,9 @@
                 <a:ea typeface="Arial" pitchFamily="34" charset="-122"/>
                 <a:cs typeface="Arial" pitchFamily="34" charset="-120"/>
               </a:rPr>
-              <a:t>Both from hormones in the soil</a:t>
-            </a:r>
-            <a:endParaRPr lang="en-US" sz="1700" dirty="0"/>
+              <a:t>Only seed structure affects how plants grow</a:t>
+            </a:r>
+            <a:endParaRPr lang="en-US" sz="1300" dirty="0"/>
           </a:p>
         </p:txBody>
       </p:sp>
@@ -5973,7 +5973,7 @@
               <a:buNone/>
             </a:pPr>
             <a:r>
-              <a:rPr lang="en-US" sz="1700" dirty="0">
+              <a:rPr lang="en-US" sz="1300" dirty="0">
                 <a:solidFill>
                   <a:srgbClr val="FFFFFF"/>
                 </a:solidFill>
@@ -5981,9 +5981,9 @@
                 <a:ea typeface="Arial" pitchFamily="34" charset="-122"/>
                 <a:cs typeface="Arial" pitchFamily="34" charset="-120"/>
               </a:rPr>
-              <a:t>Both only from photosynthesis in the first days</a:t>
-            </a:r>
-            <a:endParaRPr lang="en-US" sz="1700" dirty="0"/>
+              <a:t>Hormones replace the need for water and soil in growth</a:t>
+            </a:r>
+            <a:endParaRPr lang="en-US" sz="1300" dirty="0"/>
           </a:p>
         </p:txBody>
       </p:sp>
@@ -6073,7 +6073,7 @@
               <a:buNone/>
             </a:pPr>
             <a:r>
-              <a:rPr lang="en-US" sz="1700" dirty="0">
+              <a:rPr lang="en-US" sz="1300" dirty="0">
                 <a:solidFill>
                   <a:srgbClr val="FFFFFF"/>
                 </a:solidFill>
@@ -6081,9 +6081,9 @@
                 <a:ea typeface="Arial" pitchFamily="34" charset="-122"/>
                 <a:cs typeface="Arial" pitchFamily="34" charset="-120"/>
               </a:rPr>
-              <a:t>Maize from the cotyledons, beans from the endosperm</a:t>
-            </a:r>
-            <a:endParaRPr lang="en-US" sz="1700" dirty="0"/>
+              <a:t>Differences in growth can be caused by internal factors such as hormones, as well as seed structure, seed condition and environment</a:t>
+            </a:r>
+            <a:endParaRPr lang="en-US" sz="1300" dirty="0"/>
           </a:p>
         </p:txBody>
       </p:sp>
